--- a/slides/Lesson 8 - Testing, Tuning and Final Demo.pptx
+++ b/slides/Lesson 8 - Testing, Tuning and Final Demo.pptx
@@ -10894,7 +10894,7 @@
                 </a:solidFill>
                 <a:latin typeface="Poppins SemiBold"/>
               </a:rPr>
-              <a:t>Swapping Haiku for Sonnet roughly doubles the price.</a:t>
+              <a:t>Swapping gpt-5.4-mini for gpt-5.4 roughly triples the price.</a:t>
             </a:r>
           </a:p>
           <a:p>
